--- a/docs/product/ZHIJUN_BUSINESS_PLAN.pptx
+++ b/docs/product/ZHIJUN_BUSINESS_PLAN.pptx
@@ -24,7 +24,6 @@
     <p:sldId id="272" r:id="rId24"/>
     <p:sldId id="273" r:id="rId25"/>
     <p:sldId id="274" r:id="rId26"/>
-    <p:sldId id="275" r:id="rId27"/>
   </p:sldIdLst>
   <p:sldSz cx="12191695" cy="6858000" type="screen4x3"/>
   <p:notesSz cx="6858000" cy="9144000"/>
@@ -17896,882 +17895,6 @@
       <p:grpSpPr/>
       <p:sp>
         <p:nvSpPr>
-          <p:cNvPr id="2" name="TextBox 1"/>
-          <p:cNvSpPr txBox="1"/>
-          <p:nvPr/>
-        </p:nvSpPr>
-        <p:spPr>
-          <a:xfrm>
-            <a:off x="868680" y="502920"/>
-            <a:ext cx="10454335" cy="320040"/>
-          </a:xfrm>
-          <a:prstGeom prst="rect">
-            <a:avLst/>
-          </a:prstGeom>
-          <a:noFill/>
-        </p:spPr>
-        <p:txBody>
-          <a:bodyPr wrap="square" lIns="0" rIns="0" tIns="0" bIns="0" anchor="t">
-            <a:spAutoFit/>
-          </a:bodyPr>
-          <a:lstStyle/>
-          <a:p>
-            <a:pPr algn="l">
-              <a:lnSpc>
-                <a:spcPct val="130000"/>
-              </a:lnSpc>
-              <a:spcAft>
-                <a:spcPts val="0"/>
-              </a:spcAft>
-            </a:pPr>
-            <a:r>
-              <a:rPr sz="1200" b="0">
-                <a:solidFill>
-                  <a:srgbClr val="E3A35A"/>
-                </a:solidFill>
-                <a:latin typeface="PingFang SC"/>
-                <a:ea typeface="PingFang SC"/>
-                <a:cs typeface="PingFang SC"/>
-              </a:rPr>
-              <a:t>融资计划</a:t>
-            </a:r>
-          </a:p>
-        </p:txBody>
-      </p:sp>
-      <p:sp>
-        <p:nvSpPr>
-          <p:cNvPr id="3" name="TextBox 2"/>
-          <p:cNvSpPr txBox="1"/>
-          <p:nvPr/>
-        </p:nvSpPr>
-        <p:spPr>
-          <a:xfrm>
-            <a:off x="868680" y="822960"/>
-            <a:ext cx="10454335" cy="731520"/>
-          </a:xfrm>
-          <a:prstGeom prst="rect">
-            <a:avLst/>
-          </a:prstGeom>
-          <a:noFill/>
-        </p:spPr>
-        <p:txBody>
-          <a:bodyPr wrap="square" lIns="0" rIns="0" tIns="0" bIns="0" anchor="t">
-            <a:spAutoFit/>
-          </a:bodyPr>
-          <a:lstStyle/>
-          <a:p>
-            <a:pPr algn="l">
-              <a:lnSpc>
-                <a:spcPct val="130000"/>
-              </a:lnSpc>
-              <a:spcAft>
-                <a:spcPts val="0"/>
-              </a:spcAft>
-            </a:pPr>
-            <a:r>
-              <a:rPr sz="3600" b="1">
-                <a:solidFill>
-                  <a:srgbClr val="F2ECE1"/>
-                </a:solidFill>
-                <a:latin typeface="Songti SC"/>
-                <a:ea typeface="Songti SC"/>
-                <a:cs typeface="Songti SC"/>
-              </a:rPr>
-              <a:t>本轮融资</a:t>
-            </a:r>
-          </a:p>
-        </p:txBody>
-      </p:sp>
-      <p:sp>
-        <p:nvSpPr>
-          <p:cNvPr id="4" name="Rounded Rectangle 3"/>
-          <p:cNvSpPr/>
-          <p:nvPr/>
-        </p:nvSpPr>
-        <p:spPr>
-          <a:xfrm>
-            <a:off x="868680" y="1828800"/>
-            <a:ext cx="10454335" cy="2011680"/>
-          </a:xfrm>
-          <a:prstGeom prst="roundRect">
-            <a:avLst>
-              <a:gd name="adj" fmla="val 8000"/>
-            </a:avLst>
-          </a:prstGeom>
-          <a:noFill/>
-          <a:ln w="12700">
-            <a:solidFill>
-              <a:srgbClr val="7F776B"/>
-            </a:solidFill>
-            <a:prstDash val="dash"/>
-          </a:ln>
-          <a:effectLst/>
-        </p:spPr>
-        <p:style>
-          <a:lnRef idx="1">
-            <a:schemeClr val="accent1"/>
-          </a:lnRef>
-          <a:fillRef idx="3">
-            <a:schemeClr val="accent1"/>
-          </a:fillRef>
-          <a:effectRef idx="2">
-            <a:schemeClr val="accent1"/>
-          </a:effectRef>
-          <a:fontRef idx="minor">
-            <a:schemeClr val="lt1"/>
-          </a:fontRef>
-        </p:style>
-        <p:txBody>
-          <a:bodyPr rtlCol="0" anchor="ctr"/>
-          <a:lstStyle/>
-          <a:p/>
-        </p:txBody>
-      </p:sp>
-      <p:sp>
-        <p:nvSpPr>
-          <p:cNvPr id="5" name="TextBox 4"/>
-          <p:cNvSpPr txBox="1"/>
-          <p:nvPr/>
-        </p:nvSpPr>
-        <p:spPr>
-          <a:xfrm>
-            <a:off x="1325880" y="1828800"/>
-            <a:ext cx="9539935" cy="2011680"/>
-          </a:xfrm>
-          <a:prstGeom prst="rect">
-            <a:avLst/>
-          </a:prstGeom>
-          <a:noFill/>
-        </p:spPr>
-        <p:txBody>
-          <a:bodyPr wrap="square" lIns="0" rIns="0" tIns="0" bIns="0" anchor="ctr">
-            <a:spAutoFit/>
-          </a:bodyPr>
-          <a:lstStyle/>
-          <a:p>
-            <a:pPr algn="ctr">
-              <a:lnSpc>
-                <a:spcPct val="130000"/>
-              </a:lnSpc>
-              <a:spcAft>
-                <a:spcPts val="0"/>
-              </a:spcAft>
-            </a:pPr>
-            <a:r>
-              <a:rPr sz="1800" b="0">
-                <a:solidFill>
-                  <a:srgbClr val="7F776B"/>
-                </a:solidFill>
-                <a:latin typeface="PingFang SC"/>
-                <a:ea typeface="PingFang SC"/>
-                <a:cs typeface="PingFang SC"/>
-              </a:rPr>
-              <a:t>【待填：本轮金额、资金用途（研发 / 硬件 / 首批交付）、未来 12–18 个月的里程碑】</a:t>
-            </a:r>
-          </a:p>
-        </p:txBody>
-      </p:sp>
-    </p:spTree>
-  </p:cSld>
-  <p:clrMapOvr>
-    <a:masterClrMapping/>
-  </p:clrMapOvr>
-  <p:transition spd="med">
-    <p:fade/>
-  </p:transition>
-</p:sld>
-</file>
-
-<file path=ppt/slides/slide2.xml><?xml version="1.0" encoding="utf-8"?>
-<p:sld xmlns:a="http://schemas.openxmlformats.org/drawingml/2006/main" xmlns:p="http://schemas.openxmlformats.org/presentationml/2006/main" xmlns:r="http://schemas.openxmlformats.org/officeDocument/2006/relationships">
-  <p:cSld>
-    <p:bg>
-      <p:bgPr>
-        <a:solidFill>
-          <a:srgbClr val="100F0D"/>
-        </a:solidFill>
-        <a:effectLst/>
-      </p:bgPr>
-    </p:bg>
-    <p:spTree>
-      <p:nvGrpSpPr>
-        <p:cNvPr id="1" name=""/>
-        <p:cNvGrpSpPr/>
-        <p:nvPr/>
-      </p:nvGrpSpPr>
-      <p:grpSpPr/>
-      <p:sp>
-        <p:nvSpPr>
-          <p:cNvPr id="2" name="TextBox 1"/>
-          <p:cNvSpPr txBox="1"/>
-          <p:nvPr/>
-        </p:nvSpPr>
-        <p:spPr>
-          <a:xfrm>
-            <a:off x="868680" y="502920"/>
-            <a:ext cx="10454335" cy="320040"/>
-          </a:xfrm>
-          <a:prstGeom prst="rect">
-            <a:avLst/>
-          </a:prstGeom>
-          <a:noFill/>
-        </p:spPr>
-        <p:txBody>
-          <a:bodyPr wrap="square" lIns="0" rIns="0" tIns="0" bIns="0" anchor="t">
-            <a:spAutoFit/>
-          </a:bodyPr>
-          <a:lstStyle/>
-          <a:p>
-            <a:pPr algn="l">
-              <a:lnSpc>
-                <a:spcPct val="130000"/>
-              </a:lnSpc>
-              <a:spcAft>
-                <a:spcPts val="0"/>
-              </a:spcAft>
-            </a:pPr>
-            <a:r>
-              <a:rPr sz="1200" b="0">
-                <a:solidFill>
-                  <a:srgbClr val="E3A35A"/>
-                </a:solidFill>
-                <a:latin typeface="PingFang SC"/>
-                <a:ea typeface="PingFang SC"/>
-                <a:cs typeface="PingFang SC"/>
-              </a:rPr>
-              <a:t>机会</a:t>
-            </a:r>
-          </a:p>
-        </p:txBody>
-      </p:sp>
-      <p:sp>
-        <p:nvSpPr>
-          <p:cNvPr id="3" name="TextBox 2"/>
-          <p:cNvSpPr txBox="1"/>
-          <p:nvPr/>
-        </p:nvSpPr>
-        <p:spPr>
-          <a:xfrm>
-            <a:off x="868680" y="822960"/>
-            <a:ext cx="10454335" cy="1188720"/>
-          </a:xfrm>
-          <a:prstGeom prst="rect">
-            <a:avLst/>
-          </a:prstGeom>
-          <a:noFill/>
-        </p:spPr>
-        <p:txBody>
-          <a:bodyPr wrap="square" lIns="0" rIns="0" tIns="0" bIns="0" anchor="t">
-            <a:spAutoFit/>
-          </a:bodyPr>
-          <a:lstStyle/>
-          <a:p>
-            <a:pPr algn="l">
-              <a:lnSpc>
-                <a:spcPct val="125000"/>
-              </a:lnSpc>
-              <a:spcAft>
-                <a:spcPts val="0"/>
-              </a:spcAft>
-            </a:pPr>
-            <a:r>
-              <a:rPr sz="3200" b="1">
-                <a:solidFill>
-                  <a:srgbClr val="F2ECE1"/>
-                </a:solidFill>
-                <a:latin typeface="Songti SC"/>
-                <a:ea typeface="Songti SC"/>
-                <a:cs typeface="Songti SC"/>
-              </a:rPr>
-              <a:t>AI 正在改变每个人做事的方式，</a:t>
-            </a:r>
-          </a:p>
-          <a:p>
-            <a:pPr algn="l">
-              <a:lnSpc>
-                <a:spcPct val="125000"/>
-              </a:lnSpc>
-              <a:spcAft>
-                <a:spcPts val="0"/>
-              </a:spcAft>
-            </a:pPr>
-            <a:r>
-              <a:rPr sz="3200" b="1">
-                <a:solidFill>
-                  <a:srgbClr val="F2ECE1"/>
-                </a:solidFill>
-                <a:latin typeface="Songti SC"/>
-                <a:ea typeface="Songti SC"/>
-                <a:cs typeface="Songti SC"/>
-              </a:rPr>
-              <a:t>但还没有一个 AI 真正认识你</a:t>
-            </a:r>
-          </a:p>
-        </p:txBody>
-      </p:sp>
-      <p:sp>
-        <p:nvSpPr>
-          <p:cNvPr id="4" name="TextBox 3"/>
-          <p:cNvSpPr txBox="1"/>
-          <p:nvPr/>
-        </p:nvSpPr>
-        <p:spPr>
-          <a:xfrm>
-            <a:off x="868680" y="2148840"/>
-            <a:ext cx="10454335" cy="1097280"/>
-          </a:xfrm>
-          <a:prstGeom prst="rect">
-            <a:avLst/>
-          </a:prstGeom>
-          <a:noFill/>
-        </p:spPr>
-        <p:txBody>
-          <a:bodyPr wrap="square" lIns="0" rIns="0" tIns="0" bIns="0" anchor="t">
-            <a:spAutoFit/>
-          </a:bodyPr>
-          <a:lstStyle/>
-          <a:p>
-            <a:pPr algn="l">
-              <a:lnSpc>
-                <a:spcPct val="155000"/>
-              </a:lnSpc>
-              <a:spcAft>
-                <a:spcPts val="0"/>
-              </a:spcAft>
-            </a:pPr>
-            <a:r>
-              <a:rPr sz="1600" b="0">
-                <a:solidFill>
-                  <a:srgbClr val="BDB4A6"/>
-                </a:solidFill>
-                <a:latin typeface="PingFang SC"/>
-                <a:ea typeface="PingFang SC"/>
-                <a:cs typeface="PingFang SC"/>
-              </a:rPr>
-              <a:t>今天的 AI 懂任务，不懂人。一个人最有价值的东西——在意什么、怎么做决定、后来对不对——仍然只在他自己的脑子里：</a:t>
-            </a:r>
-          </a:p>
-        </p:txBody>
-      </p:sp>
-      <p:sp>
-        <p:nvSpPr>
-          <p:cNvPr id="5" name="Rounded Rectangle 4"/>
-          <p:cNvSpPr/>
-          <p:nvPr/>
-        </p:nvSpPr>
-        <p:spPr>
-          <a:xfrm>
-            <a:off x="868680" y="3063240"/>
-            <a:ext cx="3337560" cy="1600200"/>
-          </a:xfrm>
-          <a:prstGeom prst="roundRect">
-            <a:avLst>
-              <a:gd name="adj" fmla="val 8000"/>
-            </a:avLst>
-          </a:prstGeom>
-          <a:solidFill>
-            <a:srgbClr val="1C1915"/>
-          </a:solidFill>
-          <a:ln w="12700">
-            <a:solidFill>
-              <a:srgbClr val="302B25"/>
-            </a:solidFill>
-          </a:ln>
-          <a:effectLst/>
-        </p:spPr>
-        <p:style>
-          <a:lnRef idx="1">
-            <a:schemeClr val="accent1"/>
-          </a:lnRef>
-          <a:fillRef idx="3">
-            <a:schemeClr val="accent1"/>
-          </a:fillRef>
-          <a:effectRef idx="2">
-            <a:schemeClr val="accent1"/>
-          </a:effectRef>
-          <a:fontRef idx="minor">
-            <a:schemeClr val="lt1"/>
-          </a:fontRef>
-        </p:style>
-        <p:txBody>
-          <a:bodyPr rtlCol="0" anchor="ctr"/>
-          <a:lstStyle/>
-          <a:p/>
-        </p:txBody>
-      </p:sp>
-      <p:sp>
-        <p:nvSpPr>
-          <p:cNvPr id="6" name="TextBox 5"/>
-          <p:cNvSpPr txBox="1"/>
-          <p:nvPr/>
-        </p:nvSpPr>
-        <p:spPr>
-          <a:xfrm>
-            <a:off x="1188719" y="3337560"/>
-            <a:ext cx="2697480" cy="457200"/>
-          </a:xfrm>
-          <a:prstGeom prst="rect">
-            <a:avLst/>
-          </a:prstGeom>
-          <a:noFill/>
-        </p:spPr>
-        <p:txBody>
-          <a:bodyPr wrap="square" lIns="0" rIns="0" tIns="0" bIns="0" anchor="t">
-            <a:spAutoFit/>
-          </a:bodyPr>
-          <a:lstStyle/>
-          <a:p>
-            <a:pPr algn="l">
-              <a:lnSpc>
-                <a:spcPct val="130000"/>
-              </a:lnSpc>
-              <a:spcAft>
-                <a:spcPts val="0"/>
-              </a:spcAft>
-            </a:pPr>
-            <a:r>
-              <a:rPr sz="1900" b="1">
-                <a:solidFill>
-                  <a:srgbClr val="F2ECE1"/>
-                </a:solidFill>
-                <a:latin typeface="Songti SC"/>
-                <a:ea typeface="Songti SC"/>
-                <a:cs typeface="Songti SC"/>
-              </a:rPr>
-              <a:t>没有被好好保存</a:t>
-            </a:r>
-          </a:p>
-        </p:txBody>
-      </p:sp>
-      <p:sp>
-        <p:nvSpPr>
-          <p:cNvPr id="7" name="TextBox 6"/>
-          <p:cNvSpPr txBox="1"/>
-          <p:nvPr/>
-        </p:nvSpPr>
-        <p:spPr>
-          <a:xfrm>
-            <a:off x="1188719" y="3867911"/>
-            <a:ext cx="2697480" cy="612648"/>
-          </a:xfrm>
-          <a:prstGeom prst="rect">
-            <a:avLst/>
-          </a:prstGeom>
-          <a:noFill/>
-        </p:spPr>
-        <p:txBody>
-          <a:bodyPr wrap="square" lIns="0" rIns="0" tIns="0" bIns="0" anchor="t">
-            <a:spAutoFit/>
-          </a:bodyPr>
-          <a:lstStyle/>
-          <a:p>
-            <a:pPr algn="l">
-              <a:lnSpc>
-                <a:spcPct val="145000"/>
-              </a:lnSpc>
-              <a:spcAft>
-                <a:spcPts val="0"/>
-              </a:spcAft>
-            </a:pPr>
-            <a:r>
-              <a:rPr sz="1400" b="0">
-                <a:solidFill>
-                  <a:srgbClr val="BDB4A6"/>
-                </a:solidFill>
-                <a:latin typeface="PingFang SC"/>
-                <a:ea typeface="PingFang SC"/>
-                <a:cs typeface="PingFang SC"/>
-              </a:rPr>
-              <a:t>换一个工具、过几年，就散了。</a:t>
-            </a:r>
-          </a:p>
-        </p:txBody>
-      </p:sp>
-      <p:sp>
-        <p:nvSpPr>
-          <p:cNvPr id="8" name="Rounded Rectangle 7"/>
-          <p:cNvSpPr/>
-          <p:nvPr/>
-        </p:nvSpPr>
-        <p:spPr>
-          <a:xfrm>
-            <a:off x="4430268" y="3063240"/>
-            <a:ext cx="3337560" cy="1600200"/>
-          </a:xfrm>
-          <a:prstGeom prst="roundRect">
-            <a:avLst>
-              <a:gd name="adj" fmla="val 8000"/>
-            </a:avLst>
-          </a:prstGeom>
-          <a:solidFill>
-            <a:srgbClr val="1C1915"/>
-          </a:solidFill>
-          <a:ln w="12700">
-            <a:solidFill>
-              <a:srgbClr val="302B25"/>
-            </a:solidFill>
-          </a:ln>
-          <a:effectLst/>
-        </p:spPr>
-        <p:style>
-          <a:lnRef idx="1">
-            <a:schemeClr val="accent1"/>
-          </a:lnRef>
-          <a:fillRef idx="3">
-            <a:schemeClr val="accent1"/>
-          </a:fillRef>
-          <a:effectRef idx="2">
-            <a:schemeClr val="accent1"/>
-          </a:effectRef>
-          <a:fontRef idx="minor">
-            <a:schemeClr val="lt1"/>
-          </a:fontRef>
-        </p:style>
-        <p:txBody>
-          <a:bodyPr rtlCol="0" anchor="ctr"/>
-          <a:lstStyle/>
-          <a:p/>
-        </p:txBody>
-      </p:sp>
-      <p:sp>
-        <p:nvSpPr>
-          <p:cNvPr id="9" name="TextBox 8"/>
-          <p:cNvSpPr txBox="1"/>
-          <p:nvPr/>
-        </p:nvSpPr>
-        <p:spPr>
-          <a:xfrm>
-            <a:off x="4750307" y="3337560"/>
-            <a:ext cx="2697480" cy="457200"/>
-          </a:xfrm>
-          <a:prstGeom prst="rect">
-            <a:avLst/>
-          </a:prstGeom>
-          <a:noFill/>
-        </p:spPr>
-        <p:txBody>
-          <a:bodyPr wrap="square" lIns="0" rIns="0" tIns="0" bIns="0" anchor="t">
-            <a:spAutoFit/>
-          </a:bodyPr>
-          <a:lstStyle/>
-          <a:p>
-            <a:pPr algn="l">
-              <a:lnSpc>
-                <a:spcPct val="130000"/>
-              </a:lnSpc>
-              <a:spcAft>
-                <a:spcPts val="0"/>
-              </a:spcAft>
-            </a:pPr>
-            <a:r>
-              <a:rPr sz="1900" b="1">
-                <a:solidFill>
-                  <a:srgbClr val="F2ECE1"/>
-                </a:solidFill>
-                <a:latin typeface="Songti SC"/>
-                <a:ea typeface="Songti SC"/>
-                <a:cs typeface="Songti SC"/>
-              </a:rPr>
-              <a:t>没有被好好使用</a:t>
-            </a:r>
-          </a:p>
-        </p:txBody>
-      </p:sp>
-      <p:sp>
-        <p:nvSpPr>
-          <p:cNvPr id="10" name="TextBox 9"/>
-          <p:cNvSpPr txBox="1"/>
-          <p:nvPr/>
-        </p:nvSpPr>
-        <p:spPr>
-          <a:xfrm>
-            <a:off x="4750307" y="3867911"/>
-            <a:ext cx="2697480" cy="612648"/>
-          </a:xfrm>
-          <a:prstGeom prst="rect">
-            <a:avLst/>
-          </a:prstGeom>
-          <a:noFill/>
-        </p:spPr>
-        <p:txBody>
-          <a:bodyPr wrap="square" lIns="0" rIns="0" tIns="0" bIns="0" anchor="t">
-            <a:spAutoFit/>
-          </a:bodyPr>
-          <a:lstStyle/>
-          <a:p>
-            <a:pPr algn="l">
-              <a:lnSpc>
-                <a:spcPct val="145000"/>
-              </a:lnSpc>
-              <a:spcAft>
-                <a:spcPts val="0"/>
-              </a:spcAft>
-            </a:pPr>
-            <a:r>
-              <a:rPr sz="1400" b="0">
-                <a:solidFill>
-                  <a:srgbClr val="BDB4A6"/>
-                </a:solidFill>
-                <a:latin typeface="PingFang SC"/>
-                <a:ea typeface="PingFang SC"/>
-                <a:cs typeface="PingFang SC"/>
-              </a:rPr>
-              <a:t>要拿主意时，身边没有能说真话的人。</a:t>
-            </a:r>
-          </a:p>
-        </p:txBody>
-      </p:sp>
-      <p:sp>
-        <p:nvSpPr>
-          <p:cNvPr id="11" name="Rounded Rectangle 10"/>
-          <p:cNvSpPr/>
-          <p:nvPr/>
-        </p:nvSpPr>
-        <p:spPr>
-          <a:xfrm>
-            <a:off x="7991856" y="3063240"/>
-            <a:ext cx="3337560" cy="1600200"/>
-          </a:xfrm>
-          <a:prstGeom prst="roundRect">
-            <a:avLst>
-              <a:gd name="adj" fmla="val 8000"/>
-            </a:avLst>
-          </a:prstGeom>
-          <a:solidFill>
-            <a:srgbClr val="1C1915"/>
-          </a:solidFill>
-          <a:ln w="12700">
-            <a:solidFill>
-              <a:srgbClr val="302B25"/>
-            </a:solidFill>
-          </a:ln>
-          <a:effectLst/>
-        </p:spPr>
-        <p:style>
-          <a:lnRef idx="1">
-            <a:schemeClr val="accent1"/>
-          </a:lnRef>
-          <a:fillRef idx="3">
-            <a:schemeClr val="accent1"/>
-          </a:fillRef>
-          <a:effectRef idx="2">
-            <a:schemeClr val="accent1"/>
-          </a:effectRef>
-          <a:fontRef idx="minor">
-            <a:schemeClr val="lt1"/>
-          </a:fontRef>
-        </p:style>
-        <p:txBody>
-          <a:bodyPr rtlCol="0" anchor="ctr"/>
-          <a:lstStyle/>
-          <a:p/>
-        </p:txBody>
-      </p:sp>
-      <p:sp>
-        <p:nvSpPr>
-          <p:cNvPr id="12" name="TextBox 11"/>
-          <p:cNvSpPr txBox="1"/>
-          <p:nvPr/>
-        </p:nvSpPr>
-        <p:spPr>
-          <a:xfrm>
-            <a:off x="8311896" y="3337560"/>
-            <a:ext cx="2697480" cy="457200"/>
-          </a:xfrm>
-          <a:prstGeom prst="rect">
-            <a:avLst/>
-          </a:prstGeom>
-          <a:noFill/>
-        </p:spPr>
-        <p:txBody>
-          <a:bodyPr wrap="square" lIns="0" rIns="0" tIns="0" bIns="0" anchor="t">
-            <a:spAutoFit/>
-          </a:bodyPr>
-          <a:lstStyle/>
-          <a:p>
-            <a:pPr algn="l">
-              <a:lnSpc>
-                <a:spcPct val="130000"/>
-              </a:lnSpc>
-              <a:spcAft>
-                <a:spcPts val="0"/>
-              </a:spcAft>
-            </a:pPr>
-            <a:r>
-              <a:rPr sz="1900" b="1">
-                <a:solidFill>
-                  <a:srgbClr val="F2ECE1"/>
-                </a:solidFill>
-                <a:latin typeface="Songti SC"/>
-                <a:ea typeface="Songti SC"/>
-                <a:cs typeface="Songti SC"/>
-              </a:rPr>
-              <a:t>没有被好好分享</a:t>
-            </a:r>
-          </a:p>
-        </p:txBody>
-      </p:sp>
-      <p:sp>
-        <p:nvSpPr>
-          <p:cNvPr id="13" name="TextBox 12"/>
-          <p:cNvSpPr txBox="1"/>
-          <p:nvPr/>
-        </p:nvSpPr>
-        <p:spPr>
-          <a:xfrm>
-            <a:off x="8311896" y="3867911"/>
-            <a:ext cx="2697480" cy="612648"/>
-          </a:xfrm>
-          <a:prstGeom prst="rect">
-            <a:avLst/>
-          </a:prstGeom>
-          <a:noFill/>
-        </p:spPr>
-        <p:txBody>
-          <a:bodyPr wrap="square" lIns="0" rIns="0" tIns="0" bIns="0" anchor="t">
-            <a:spAutoFit/>
-          </a:bodyPr>
-          <a:lstStyle/>
-          <a:p>
-            <a:pPr algn="l">
-              <a:lnSpc>
-                <a:spcPct val="145000"/>
-              </a:lnSpc>
-              <a:spcAft>
-                <a:spcPts val="0"/>
-              </a:spcAft>
-            </a:pPr>
-            <a:r>
-              <a:rPr sz="1400" b="0">
-                <a:solidFill>
-                  <a:srgbClr val="BDB4A6"/>
-                </a:solidFill>
-                <a:latin typeface="PingFang SC"/>
-                <a:ea typeface="PingFang SC"/>
-                <a:cs typeface="PingFang SC"/>
-              </a:rPr>
-              <a:t>经验只能靠本人一次次亲自讲。</a:t>
-            </a:r>
-          </a:p>
-        </p:txBody>
-      </p:sp>
-      <p:sp>
-        <p:nvSpPr>
-          <p:cNvPr id="14" name="Rectangle 13"/>
-          <p:cNvSpPr/>
-          <p:nvPr/>
-        </p:nvSpPr>
-        <p:spPr>
-          <a:xfrm>
-            <a:off x="868680" y="5065776"/>
-            <a:ext cx="36576" cy="658368"/>
-          </a:xfrm>
-          <a:prstGeom prst="rect">
-            <a:avLst/>
-          </a:prstGeom>
-          <a:solidFill>
-            <a:srgbClr val="E3A35A"/>
-          </a:solidFill>
-          <a:ln>
-            <a:noFill/>
-          </a:ln>
-          <a:effectLst/>
-        </p:spPr>
-        <p:style>
-          <a:lnRef idx="1">
-            <a:schemeClr val="accent1"/>
-          </a:lnRef>
-          <a:fillRef idx="3">
-            <a:schemeClr val="accent1"/>
-          </a:fillRef>
-          <a:effectRef idx="2">
-            <a:schemeClr val="accent1"/>
-          </a:effectRef>
-          <a:fontRef idx="minor">
-            <a:schemeClr val="lt1"/>
-          </a:fontRef>
-        </p:style>
-        <p:txBody>
-          <a:bodyPr rtlCol="0" anchor="ctr"/>
-          <a:lstStyle/>
-          <a:p/>
-        </p:txBody>
-      </p:sp>
-      <p:sp>
-        <p:nvSpPr>
-          <p:cNvPr id="15" name="TextBox 14"/>
-          <p:cNvSpPr txBox="1"/>
-          <p:nvPr/>
-        </p:nvSpPr>
-        <p:spPr>
-          <a:xfrm>
-            <a:off x="1069848" y="5029200"/>
-            <a:ext cx="10253167" cy="731520"/>
-          </a:xfrm>
-          <a:prstGeom prst="rect">
-            <a:avLst/>
-          </a:prstGeom>
-          <a:noFill/>
-        </p:spPr>
-        <p:txBody>
-          <a:bodyPr wrap="square" lIns="0" rIns="0" tIns="0" bIns="0" anchor="ctr">
-            <a:spAutoFit/>
-          </a:bodyPr>
-          <a:lstStyle/>
-          <a:p>
-            <a:pPr algn="l">
-              <a:lnSpc>
-                <a:spcPct val="140000"/>
-              </a:lnSpc>
-              <a:spcAft>
-                <a:spcPts val="0"/>
-              </a:spcAft>
-            </a:pPr>
-            <a:r>
-              <a:rPr sz="1400" b="0">
-                <a:solidFill>
-                  <a:srgbClr val="BDB4A6"/>
-                </a:solidFill>
-                <a:latin typeface="PingFang SC"/>
-                <a:ea typeface="PingFang SC"/>
-                <a:cs typeface="PingFang SC"/>
-              </a:rPr>
-              <a:t>大模型第一次让「长期理解一个人」成为可能。知君把一个人的判断与经验，变成他自己持有、持续生长、可以分享的资产。</a:t>
-            </a:r>
-          </a:p>
-        </p:txBody>
-      </p:sp>
-    </p:spTree>
-  </p:cSld>
-  <p:clrMapOvr>
-    <a:masterClrMapping/>
-  </p:clrMapOvr>
-  <p:transition spd="med">
-    <p:fade/>
-  </p:transition>
-</p:sld>
-</file>
-
-<file path=ppt/slides/slide20.xml><?xml version="1.0" encoding="utf-8"?>
-<p:sld xmlns:a="http://schemas.openxmlformats.org/drawingml/2006/main" xmlns:p="http://schemas.openxmlformats.org/presentationml/2006/main" xmlns:r="http://schemas.openxmlformats.org/officeDocument/2006/relationships">
-  <p:cSld>
-    <p:bg>
-      <p:bgPr>
-        <a:solidFill>
-          <a:srgbClr val="100F0D"/>
-        </a:solidFill>
-        <a:effectLst/>
-      </p:bgPr>
-    </p:bg>
-    <p:spTree>
-      <p:nvGrpSpPr>
-        <p:cNvPr id="1" name=""/>
-        <p:cNvGrpSpPr/>
-        <p:nvPr/>
-      </p:nvGrpSpPr>
-      <p:grpSpPr/>
-      <p:sp>
-        <p:nvSpPr>
           <p:cNvPr id="2" name="Freeform 1"/>
           <p:cNvSpPr/>
           <p:nvPr/>
@@ -19170,6 +18293,676 @@
                 <a:cs typeface="PingFang SC"/>
               </a:rPr>
               <a:t>知君 · 半人马人工智能</a:t>
+            </a:r>
+          </a:p>
+        </p:txBody>
+      </p:sp>
+    </p:spTree>
+  </p:cSld>
+  <p:clrMapOvr>
+    <a:masterClrMapping/>
+  </p:clrMapOvr>
+  <p:transition spd="med">
+    <p:fade/>
+  </p:transition>
+</p:sld>
+</file>
+
+<file path=ppt/slides/slide2.xml><?xml version="1.0" encoding="utf-8"?>
+<p:sld xmlns:a="http://schemas.openxmlformats.org/drawingml/2006/main" xmlns:p="http://schemas.openxmlformats.org/presentationml/2006/main" xmlns:r="http://schemas.openxmlformats.org/officeDocument/2006/relationships">
+  <p:cSld>
+    <p:bg>
+      <p:bgPr>
+        <a:solidFill>
+          <a:srgbClr val="100F0D"/>
+        </a:solidFill>
+        <a:effectLst/>
+      </p:bgPr>
+    </p:bg>
+    <p:spTree>
+      <p:nvGrpSpPr>
+        <p:cNvPr id="1" name=""/>
+        <p:cNvGrpSpPr/>
+        <p:nvPr/>
+      </p:nvGrpSpPr>
+      <p:grpSpPr/>
+      <p:sp>
+        <p:nvSpPr>
+          <p:cNvPr id="2" name="TextBox 1"/>
+          <p:cNvSpPr txBox="1"/>
+          <p:nvPr/>
+        </p:nvSpPr>
+        <p:spPr>
+          <a:xfrm>
+            <a:off x="868680" y="502920"/>
+            <a:ext cx="10454335" cy="320040"/>
+          </a:xfrm>
+          <a:prstGeom prst="rect">
+            <a:avLst/>
+          </a:prstGeom>
+          <a:noFill/>
+        </p:spPr>
+        <p:txBody>
+          <a:bodyPr wrap="square" lIns="0" rIns="0" tIns="0" bIns="0" anchor="t">
+            <a:spAutoFit/>
+          </a:bodyPr>
+          <a:lstStyle/>
+          <a:p>
+            <a:pPr algn="l">
+              <a:lnSpc>
+                <a:spcPct val="130000"/>
+              </a:lnSpc>
+              <a:spcAft>
+                <a:spcPts val="0"/>
+              </a:spcAft>
+            </a:pPr>
+            <a:r>
+              <a:rPr sz="1200" b="0">
+                <a:solidFill>
+                  <a:srgbClr val="E3A35A"/>
+                </a:solidFill>
+                <a:latin typeface="PingFang SC"/>
+                <a:ea typeface="PingFang SC"/>
+                <a:cs typeface="PingFang SC"/>
+              </a:rPr>
+              <a:t>机会</a:t>
+            </a:r>
+          </a:p>
+        </p:txBody>
+      </p:sp>
+      <p:sp>
+        <p:nvSpPr>
+          <p:cNvPr id="3" name="TextBox 2"/>
+          <p:cNvSpPr txBox="1"/>
+          <p:nvPr/>
+        </p:nvSpPr>
+        <p:spPr>
+          <a:xfrm>
+            <a:off x="868680" y="822960"/>
+            <a:ext cx="10454335" cy="1188720"/>
+          </a:xfrm>
+          <a:prstGeom prst="rect">
+            <a:avLst/>
+          </a:prstGeom>
+          <a:noFill/>
+        </p:spPr>
+        <p:txBody>
+          <a:bodyPr wrap="square" lIns="0" rIns="0" tIns="0" bIns="0" anchor="t">
+            <a:spAutoFit/>
+          </a:bodyPr>
+          <a:lstStyle/>
+          <a:p>
+            <a:pPr algn="l">
+              <a:lnSpc>
+                <a:spcPct val="125000"/>
+              </a:lnSpc>
+              <a:spcAft>
+                <a:spcPts val="0"/>
+              </a:spcAft>
+            </a:pPr>
+            <a:r>
+              <a:rPr sz="3200" b="1">
+                <a:solidFill>
+                  <a:srgbClr val="F2ECE1"/>
+                </a:solidFill>
+                <a:latin typeface="Songti SC"/>
+                <a:ea typeface="Songti SC"/>
+                <a:cs typeface="Songti SC"/>
+              </a:rPr>
+              <a:t>AI 正在改变每个人做事的方式，</a:t>
+            </a:r>
+          </a:p>
+          <a:p>
+            <a:pPr algn="l">
+              <a:lnSpc>
+                <a:spcPct val="125000"/>
+              </a:lnSpc>
+              <a:spcAft>
+                <a:spcPts val="0"/>
+              </a:spcAft>
+            </a:pPr>
+            <a:r>
+              <a:rPr sz="3200" b="1">
+                <a:solidFill>
+                  <a:srgbClr val="F2ECE1"/>
+                </a:solidFill>
+                <a:latin typeface="Songti SC"/>
+                <a:ea typeface="Songti SC"/>
+                <a:cs typeface="Songti SC"/>
+              </a:rPr>
+              <a:t>但还没有一个 AI 真正认识你</a:t>
+            </a:r>
+          </a:p>
+        </p:txBody>
+      </p:sp>
+      <p:sp>
+        <p:nvSpPr>
+          <p:cNvPr id="4" name="TextBox 3"/>
+          <p:cNvSpPr txBox="1"/>
+          <p:nvPr/>
+        </p:nvSpPr>
+        <p:spPr>
+          <a:xfrm>
+            <a:off x="868680" y="2148840"/>
+            <a:ext cx="10454335" cy="1097280"/>
+          </a:xfrm>
+          <a:prstGeom prst="rect">
+            <a:avLst/>
+          </a:prstGeom>
+          <a:noFill/>
+        </p:spPr>
+        <p:txBody>
+          <a:bodyPr wrap="square" lIns="0" rIns="0" tIns="0" bIns="0" anchor="t">
+            <a:spAutoFit/>
+          </a:bodyPr>
+          <a:lstStyle/>
+          <a:p>
+            <a:pPr algn="l">
+              <a:lnSpc>
+                <a:spcPct val="155000"/>
+              </a:lnSpc>
+              <a:spcAft>
+                <a:spcPts val="0"/>
+              </a:spcAft>
+            </a:pPr>
+            <a:r>
+              <a:rPr sz="1600" b="0">
+                <a:solidFill>
+                  <a:srgbClr val="BDB4A6"/>
+                </a:solidFill>
+                <a:latin typeface="PingFang SC"/>
+                <a:ea typeface="PingFang SC"/>
+                <a:cs typeface="PingFang SC"/>
+              </a:rPr>
+              <a:t>今天的 AI 懂任务，不懂人。一个人最有价值的东西——在意什么、怎么做决定、后来对不对——仍然只在他自己的脑子里：</a:t>
+            </a:r>
+          </a:p>
+        </p:txBody>
+      </p:sp>
+      <p:sp>
+        <p:nvSpPr>
+          <p:cNvPr id="5" name="Rounded Rectangle 4"/>
+          <p:cNvSpPr/>
+          <p:nvPr/>
+        </p:nvSpPr>
+        <p:spPr>
+          <a:xfrm>
+            <a:off x="868680" y="3063240"/>
+            <a:ext cx="3337560" cy="1600200"/>
+          </a:xfrm>
+          <a:prstGeom prst="roundRect">
+            <a:avLst>
+              <a:gd name="adj" fmla="val 8000"/>
+            </a:avLst>
+          </a:prstGeom>
+          <a:solidFill>
+            <a:srgbClr val="1C1915"/>
+          </a:solidFill>
+          <a:ln w="12700">
+            <a:solidFill>
+              <a:srgbClr val="302B25"/>
+            </a:solidFill>
+          </a:ln>
+          <a:effectLst/>
+        </p:spPr>
+        <p:style>
+          <a:lnRef idx="1">
+            <a:schemeClr val="accent1"/>
+          </a:lnRef>
+          <a:fillRef idx="3">
+            <a:schemeClr val="accent1"/>
+          </a:fillRef>
+          <a:effectRef idx="2">
+            <a:schemeClr val="accent1"/>
+          </a:effectRef>
+          <a:fontRef idx="minor">
+            <a:schemeClr val="lt1"/>
+          </a:fontRef>
+        </p:style>
+        <p:txBody>
+          <a:bodyPr rtlCol="0" anchor="ctr"/>
+          <a:lstStyle/>
+          <a:p/>
+        </p:txBody>
+      </p:sp>
+      <p:sp>
+        <p:nvSpPr>
+          <p:cNvPr id="6" name="TextBox 5"/>
+          <p:cNvSpPr txBox="1"/>
+          <p:nvPr/>
+        </p:nvSpPr>
+        <p:spPr>
+          <a:xfrm>
+            <a:off x="1188719" y="3337560"/>
+            <a:ext cx="2697480" cy="457200"/>
+          </a:xfrm>
+          <a:prstGeom prst="rect">
+            <a:avLst/>
+          </a:prstGeom>
+          <a:noFill/>
+        </p:spPr>
+        <p:txBody>
+          <a:bodyPr wrap="square" lIns="0" rIns="0" tIns="0" bIns="0" anchor="t">
+            <a:spAutoFit/>
+          </a:bodyPr>
+          <a:lstStyle/>
+          <a:p>
+            <a:pPr algn="l">
+              <a:lnSpc>
+                <a:spcPct val="130000"/>
+              </a:lnSpc>
+              <a:spcAft>
+                <a:spcPts val="0"/>
+              </a:spcAft>
+            </a:pPr>
+            <a:r>
+              <a:rPr sz="1900" b="1">
+                <a:solidFill>
+                  <a:srgbClr val="F2ECE1"/>
+                </a:solidFill>
+                <a:latin typeface="Songti SC"/>
+                <a:ea typeface="Songti SC"/>
+                <a:cs typeface="Songti SC"/>
+              </a:rPr>
+              <a:t>没有被好好保存</a:t>
+            </a:r>
+          </a:p>
+        </p:txBody>
+      </p:sp>
+      <p:sp>
+        <p:nvSpPr>
+          <p:cNvPr id="7" name="TextBox 6"/>
+          <p:cNvSpPr txBox="1"/>
+          <p:nvPr/>
+        </p:nvSpPr>
+        <p:spPr>
+          <a:xfrm>
+            <a:off x="1188719" y="3867911"/>
+            <a:ext cx="2697480" cy="612648"/>
+          </a:xfrm>
+          <a:prstGeom prst="rect">
+            <a:avLst/>
+          </a:prstGeom>
+          <a:noFill/>
+        </p:spPr>
+        <p:txBody>
+          <a:bodyPr wrap="square" lIns="0" rIns="0" tIns="0" bIns="0" anchor="t">
+            <a:spAutoFit/>
+          </a:bodyPr>
+          <a:lstStyle/>
+          <a:p>
+            <a:pPr algn="l">
+              <a:lnSpc>
+                <a:spcPct val="145000"/>
+              </a:lnSpc>
+              <a:spcAft>
+                <a:spcPts val="0"/>
+              </a:spcAft>
+            </a:pPr>
+            <a:r>
+              <a:rPr sz="1400" b="0">
+                <a:solidFill>
+                  <a:srgbClr val="BDB4A6"/>
+                </a:solidFill>
+                <a:latin typeface="PingFang SC"/>
+                <a:ea typeface="PingFang SC"/>
+                <a:cs typeface="PingFang SC"/>
+              </a:rPr>
+              <a:t>换一个工具、过几年，就散了。</a:t>
+            </a:r>
+          </a:p>
+        </p:txBody>
+      </p:sp>
+      <p:sp>
+        <p:nvSpPr>
+          <p:cNvPr id="8" name="Rounded Rectangle 7"/>
+          <p:cNvSpPr/>
+          <p:nvPr/>
+        </p:nvSpPr>
+        <p:spPr>
+          <a:xfrm>
+            <a:off x="4430268" y="3063240"/>
+            <a:ext cx="3337560" cy="1600200"/>
+          </a:xfrm>
+          <a:prstGeom prst="roundRect">
+            <a:avLst>
+              <a:gd name="adj" fmla="val 8000"/>
+            </a:avLst>
+          </a:prstGeom>
+          <a:solidFill>
+            <a:srgbClr val="1C1915"/>
+          </a:solidFill>
+          <a:ln w="12700">
+            <a:solidFill>
+              <a:srgbClr val="302B25"/>
+            </a:solidFill>
+          </a:ln>
+          <a:effectLst/>
+        </p:spPr>
+        <p:style>
+          <a:lnRef idx="1">
+            <a:schemeClr val="accent1"/>
+          </a:lnRef>
+          <a:fillRef idx="3">
+            <a:schemeClr val="accent1"/>
+          </a:fillRef>
+          <a:effectRef idx="2">
+            <a:schemeClr val="accent1"/>
+          </a:effectRef>
+          <a:fontRef idx="minor">
+            <a:schemeClr val="lt1"/>
+          </a:fontRef>
+        </p:style>
+        <p:txBody>
+          <a:bodyPr rtlCol="0" anchor="ctr"/>
+          <a:lstStyle/>
+          <a:p/>
+        </p:txBody>
+      </p:sp>
+      <p:sp>
+        <p:nvSpPr>
+          <p:cNvPr id="9" name="TextBox 8"/>
+          <p:cNvSpPr txBox="1"/>
+          <p:nvPr/>
+        </p:nvSpPr>
+        <p:spPr>
+          <a:xfrm>
+            <a:off x="4750307" y="3337560"/>
+            <a:ext cx="2697480" cy="457200"/>
+          </a:xfrm>
+          <a:prstGeom prst="rect">
+            <a:avLst/>
+          </a:prstGeom>
+          <a:noFill/>
+        </p:spPr>
+        <p:txBody>
+          <a:bodyPr wrap="square" lIns="0" rIns="0" tIns="0" bIns="0" anchor="t">
+            <a:spAutoFit/>
+          </a:bodyPr>
+          <a:lstStyle/>
+          <a:p>
+            <a:pPr algn="l">
+              <a:lnSpc>
+                <a:spcPct val="130000"/>
+              </a:lnSpc>
+              <a:spcAft>
+                <a:spcPts val="0"/>
+              </a:spcAft>
+            </a:pPr>
+            <a:r>
+              <a:rPr sz="1900" b="1">
+                <a:solidFill>
+                  <a:srgbClr val="F2ECE1"/>
+                </a:solidFill>
+                <a:latin typeface="Songti SC"/>
+                <a:ea typeface="Songti SC"/>
+                <a:cs typeface="Songti SC"/>
+              </a:rPr>
+              <a:t>没有被好好使用</a:t>
+            </a:r>
+          </a:p>
+        </p:txBody>
+      </p:sp>
+      <p:sp>
+        <p:nvSpPr>
+          <p:cNvPr id="10" name="TextBox 9"/>
+          <p:cNvSpPr txBox="1"/>
+          <p:nvPr/>
+        </p:nvSpPr>
+        <p:spPr>
+          <a:xfrm>
+            <a:off x="4750307" y="3867911"/>
+            <a:ext cx="2697480" cy="612648"/>
+          </a:xfrm>
+          <a:prstGeom prst="rect">
+            <a:avLst/>
+          </a:prstGeom>
+          <a:noFill/>
+        </p:spPr>
+        <p:txBody>
+          <a:bodyPr wrap="square" lIns="0" rIns="0" tIns="0" bIns="0" anchor="t">
+            <a:spAutoFit/>
+          </a:bodyPr>
+          <a:lstStyle/>
+          <a:p>
+            <a:pPr algn="l">
+              <a:lnSpc>
+                <a:spcPct val="145000"/>
+              </a:lnSpc>
+              <a:spcAft>
+                <a:spcPts val="0"/>
+              </a:spcAft>
+            </a:pPr>
+            <a:r>
+              <a:rPr sz="1400" b="0">
+                <a:solidFill>
+                  <a:srgbClr val="BDB4A6"/>
+                </a:solidFill>
+                <a:latin typeface="PingFang SC"/>
+                <a:ea typeface="PingFang SC"/>
+                <a:cs typeface="PingFang SC"/>
+              </a:rPr>
+              <a:t>要拿主意时，身边没有能说真话的人。</a:t>
+            </a:r>
+          </a:p>
+        </p:txBody>
+      </p:sp>
+      <p:sp>
+        <p:nvSpPr>
+          <p:cNvPr id="11" name="Rounded Rectangle 10"/>
+          <p:cNvSpPr/>
+          <p:nvPr/>
+        </p:nvSpPr>
+        <p:spPr>
+          <a:xfrm>
+            <a:off x="7991856" y="3063240"/>
+            <a:ext cx="3337560" cy="1600200"/>
+          </a:xfrm>
+          <a:prstGeom prst="roundRect">
+            <a:avLst>
+              <a:gd name="adj" fmla="val 8000"/>
+            </a:avLst>
+          </a:prstGeom>
+          <a:solidFill>
+            <a:srgbClr val="1C1915"/>
+          </a:solidFill>
+          <a:ln w="12700">
+            <a:solidFill>
+              <a:srgbClr val="302B25"/>
+            </a:solidFill>
+          </a:ln>
+          <a:effectLst/>
+        </p:spPr>
+        <p:style>
+          <a:lnRef idx="1">
+            <a:schemeClr val="accent1"/>
+          </a:lnRef>
+          <a:fillRef idx="3">
+            <a:schemeClr val="accent1"/>
+          </a:fillRef>
+          <a:effectRef idx="2">
+            <a:schemeClr val="accent1"/>
+          </a:effectRef>
+          <a:fontRef idx="minor">
+            <a:schemeClr val="lt1"/>
+          </a:fontRef>
+        </p:style>
+        <p:txBody>
+          <a:bodyPr rtlCol="0" anchor="ctr"/>
+          <a:lstStyle/>
+          <a:p/>
+        </p:txBody>
+      </p:sp>
+      <p:sp>
+        <p:nvSpPr>
+          <p:cNvPr id="12" name="TextBox 11"/>
+          <p:cNvSpPr txBox="1"/>
+          <p:nvPr/>
+        </p:nvSpPr>
+        <p:spPr>
+          <a:xfrm>
+            <a:off x="8311896" y="3337560"/>
+            <a:ext cx="2697480" cy="457200"/>
+          </a:xfrm>
+          <a:prstGeom prst="rect">
+            <a:avLst/>
+          </a:prstGeom>
+          <a:noFill/>
+        </p:spPr>
+        <p:txBody>
+          <a:bodyPr wrap="square" lIns="0" rIns="0" tIns="0" bIns="0" anchor="t">
+            <a:spAutoFit/>
+          </a:bodyPr>
+          <a:lstStyle/>
+          <a:p>
+            <a:pPr algn="l">
+              <a:lnSpc>
+                <a:spcPct val="130000"/>
+              </a:lnSpc>
+              <a:spcAft>
+                <a:spcPts val="0"/>
+              </a:spcAft>
+            </a:pPr>
+            <a:r>
+              <a:rPr sz="1900" b="1">
+                <a:solidFill>
+                  <a:srgbClr val="F2ECE1"/>
+                </a:solidFill>
+                <a:latin typeface="Songti SC"/>
+                <a:ea typeface="Songti SC"/>
+                <a:cs typeface="Songti SC"/>
+              </a:rPr>
+              <a:t>没有被好好分享</a:t>
+            </a:r>
+          </a:p>
+        </p:txBody>
+      </p:sp>
+      <p:sp>
+        <p:nvSpPr>
+          <p:cNvPr id="13" name="TextBox 12"/>
+          <p:cNvSpPr txBox="1"/>
+          <p:nvPr/>
+        </p:nvSpPr>
+        <p:spPr>
+          <a:xfrm>
+            <a:off x="8311896" y="3867911"/>
+            <a:ext cx="2697480" cy="612648"/>
+          </a:xfrm>
+          <a:prstGeom prst="rect">
+            <a:avLst/>
+          </a:prstGeom>
+          <a:noFill/>
+        </p:spPr>
+        <p:txBody>
+          <a:bodyPr wrap="square" lIns="0" rIns="0" tIns="0" bIns="0" anchor="t">
+            <a:spAutoFit/>
+          </a:bodyPr>
+          <a:lstStyle/>
+          <a:p>
+            <a:pPr algn="l">
+              <a:lnSpc>
+                <a:spcPct val="145000"/>
+              </a:lnSpc>
+              <a:spcAft>
+                <a:spcPts val="0"/>
+              </a:spcAft>
+            </a:pPr>
+            <a:r>
+              <a:rPr sz="1400" b="0">
+                <a:solidFill>
+                  <a:srgbClr val="BDB4A6"/>
+                </a:solidFill>
+                <a:latin typeface="PingFang SC"/>
+                <a:ea typeface="PingFang SC"/>
+                <a:cs typeface="PingFang SC"/>
+              </a:rPr>
+              <a:t>经验只能靠本人一次次亲自讲。</a:t>
+            </a:r>
+          </a:p>
+        </p:txBody>
+      </p:sp>
+      <p:sp>
+        <p:nvSpPr>
+          <p:cNvPr id="14" name="Rectangle 13"/>
+          <p:cNvSpPr/>
+          <p:nvPr/>
+        </p:nvSpPr>
+        <p:spPr>
+          <a:xfrm>
+            <a:off x="868680" y="5065776"/>
+            <a:ext cx="36576" cy="658368"/>
+          </a:xfrm>
+          <a:prstGeom prst="rect">
+            <a:avLst/>
+          </a:prstGeom>
+          <a:solidFill>
+            <a:srgbClr val="E3A35A"/>
+          </a:solidFill>
+          <a:ln>
+            <a:noFill/>
+          </a:ln>
+          <a:effectLst/>
+        </p:spPr>
+        <p:style>
+          <a:lnRef idx="1">
+            <a:schemeClr val="accent1"/>
+          </a:lnRef>
+          <a:fillRef idx="3">
+            <a:schemeClr val="accent1"/>
+          </a:fillRef>
+          <a:effectRef idx="2">
+            <a:schemeClr val="accent1"/>
+          </a:effectRef>
+          <a:fontRef idx="minor">
+            <a:schemeClr val="lt1"/>
+          </a:fontRef>
+        </p:style>
+        <p:txBody>
+          <a:bodyPr rtlCol="0" anchor="ctr"/>
+          <a:lstStyle/>
+          <a:p/>
+        </p:txBody>
+      </p:sp>
+      <p:sp>
+        <p:nvSpPr>
+          <p:cNvPr id="15" name="TextBox 14"/>
+          <p:cNvSpPr txBox="1"/>
+          <p:nvPr/>
+        </p:nvSpPr>
+        <p:spPr>
+          <a:xfrm>
+            <a:off x="1069848" y="5029200"/>
+            <a:ext cx="10253167" cy="731520"/>
+          </a:xfrm>
+          <a:prstGeom prst="rect">
+            <a:avLst/>
+          </a:prstGeom>
+          <a:noFill/>
+        </p:spPr>
+        <p:txBody>
+          <a:bodyPr wrap="square" lIns="0" rIns="0" tIns="0" bIns="0" anchor="ctr">
+            <a:spAutoFit/>
+          </a:bodyPr>
+          <a:lstStyle/>
+          <a:p>
+            <a:pPr algn="l">
+              <a:lnSpc>
+                <a:spcPct val="140000"/>
+              </a:lnSpc>
+              <a:spcAft>
+                <a:spcPts val="0"/>
+              </a:spcAft>
+            </a:pPr>
+            <a:r>
+              <a:rPr sz="1400" b="0">
+                <a:solidFill>
+                  <a:srgbClr val="BDB4A6"/>
+                </a:solidFill>
+                <a:latin typeface="PingFang SC"/>
+                <a:ea typeface="PingFang SC"/>
+                <a:cs typeface="PingFang SC"/>
+              </a:rPr>
+              <a:t>大模型第一次让「长期理解一个人」成为可能。知君把一个人的判断与经验，变成他自己持有、持续生长、可以分享的资产。</a:t>
             </a:r>
           </a:p>
         </p:txBody>

--- a/docs/product/ZHIJUN_BUSINESS_PLAN.pptx
+++ b/docs/product/ZHIJUN_BUSINESS_PLAN.pptx
@@ -4330,8 +4330,8 @@
         </p:nvSpPr>
         <p:spPr>
           <a:xfrm>
-            <a:off x="868680" y="2697480"/>
-            <a:ext cx="6400800" cy="548640"/>
+            <a:off x="868680" y="2606040"/>
+            <a:ext cx="6400800" cy="457200"/>
           </a:xfrm>
           <a:prstGeom prst="rect">
             <a:avLst/>
@@ -4353,7 +4353,51 @@
               </a:spcAft>
             </a:pPr>
             <a:r>
-              <a:rPr sz="2600" b="0">
+              <a:rPr sz="2200" b="0">
+                <a:solidFill>
+                  <a:srgbClr val="BDB4A6"/>
+                </a:solidFill>
+                <a:latin typeface="Avenir Next"/>
+                <a:ea typeface="Avenir Next"/>
+                <a:cs typeface="Avenir Next"/>
+              </a:rPr>
+              <a:t>contextofme</a:t>
+            </a:r>
+          </a:p>
+        </p:txBody>
+      </p:sp>
+      <p:sp>
+        <p:nvSpPr>
+          <p:cNvPr id="5" name="TextBox 4"/>
+          <p:cNvSpPr txBox="1"/>
+          <p:nvPr/>
+        </p:nvSpPr>
+        <p:spPr>
+          <a:xfrm>
+            <a:off x="868680" y="3063240"/>
+            <a:ext cx="6400800" cy="548640"/>
+          </a:xfrm>
+          <a:prstGeom prst="rect">
+            <a:avLst/>
+          </a:prstGeom>
+          <a:noFill/>
+        </p:spPr>
+        <p:txBody>
+          <a:bodyPr wrap="square" lIns="0" rIns="0" tIns="0" bIns="0" anchor="t">
+            <a:spAutoFit/>
+          </a:bodyPr>
+          <a:lstStyle/>
+          <a:p>
+            <a:pPr algn="l">
+              <a:lnSpc>
+                <a:spcPct val="130000"/>
+              </a:lnSpc>
+              <a:spcAft>
+                <a:spcPts val="0"/>
+              </a:spcAft>
+            </a:pPr>
+            <a:r>
+              <a:rPr sz="2400" b="0">
                 <a:solidFill>
                   <a:srgbClr val="F4CD96"/>
                 </a:solidFill>
@@ -4368,13 +4412,13 @@
       </p:sp>
       <p:sp>
         <p:nvSpPr>
-          <p:cNvPr id="5" name="TextBox 4"/>
+          <p:cNvPr id="6" name="TextBox 5"/>
           <p:cNvSpPr txBox="1"/>
           <p:nvPr/>
         </p:nvSpPr>
         <p:spPr>
           <a:xfrm>
-            <a:off x="868680" y="3703320"/>
+            <a:off x="868680" y="3886200"/>
             <a:ext cx="6035040" cy="1645920"/>
           </a:xfrm>
           <a:prstGeom prst="rect">
@@ -4454,7 +4498,7 @@
       </p:sp>
       <p:sp>
         <p:nvSpPr>
-          <p:cNvPr id="6" name="Oval 5"/>
+          <p:cNvPr id="7" name="Oval 6"/>
           <p:cNvSpPr/>
           <p:nvPr/>
         </p:nvSpPr>
@@ -4498,7 +4542,7 @@
       </p:sp>
       <p:sp>
         <p:nvSpPr>
-          <p:cNvPr id="7" name="Oval 6"/>
+          <p:cNvPr id="8" name="Oval 7"/>
           <p:cNvSpPr/>
           <p:nvPr/>
         </p:nvSpPr>
@@ -4542,7 +4586,7 @@
       </p:sp>
       <p:sp>
         <p:nvSpPr>
-          <p:cNvPr id="8" name="Freeform 7"/>
+          <p:cNvPr id="9" name="Freeform 8"/>
           <p:cNvSpPr/>
           <p:nvPr/>
         </p:nvSpPr>
@@ -4611,7 +4655,7 @@
       </p:sp>
       <p:sp>
         <p:nvSpPr>
-          <p:cNvPr id="9" name="Freeform 8"/>
+          <p:cNvPr id="10" name="Freeform 9"/>
           <p:cNvSpPr/>
           <p:nvPr/>
         </p:nvSpPr>
@@ -4680,7 +4724,7 @@
       </p:sp>
       <p:sp>
         <p:nvSpPr>
-          <p:cNvPr id="10" name="Freeform 9"/>
+          <p:cNvPr id="11" name="Freeform 10"/>
           <p:cNvSpPr/>
           <p:nvPr/>
         </p:nvSpPr>
@@ -4749,7 +4793,7 @@
       </p:sp>
       <p:sp>
         <p:nvSpPr>
-          <p:cNvPr id="11" name="Oval 10"/>
+          <p:cNvPr id="12" name="Oval 11"/>
           <p:cNvSpPr/>
           <p:nvPr/>
         </p:nvSpPr>
@@ -4793,7 +4837,7 @@
       </p:sp>
       <p:sp>
         <p:nvSpPr>
-          <p:cNvPr id="12" name="Oval 11"/>
+          <p:cNvPr id="13" name="Oval 12"/>
           <p:cNvSpPr/>
           <p:nvPr/>
         </p:nvSpPr>
@@ -4837,7 +4881,7 @@
       </p:sp>
       <p:sp>
         <p:nvSpPr>
-          <p:cNvPr id="13" name="Oval 12"/>
+          <p:cNvPr id="14" name="Oval 13"/>
           <p:cNvSpPr/>
           <p:nvPr/>
         </p:nvSpPr>
@@ -4881,7 +4925,7 @@
       </p:sp>
       <p:sp>
         <p:nvSpPr>
-          <p:cNvPr id="14" name="Oval 13"/>
+          <p:cNvPr id="15" name="Oval 14"/>
           <p:cNvSpPr/>
           <p:nvPr/>
         </p:nvSpPr>
@@ -4925,7 +4969,7 @@
       </p:sp>
       <p:sp>
         <p:nvSpPr>
-          <p:cNvPr id="15" name="Oval 14"/>
+          <p:cNvPr id="16" name="Oval 15"/>
           <p:cNvSpPr/>
           <p:nvPr/>
         </p:nvSpPr>
@@ -4969,7 +5013,7 @@
       </p:sp>
       <p:sp>
         <p:nvSpPr>
-          <p:cNvPr id="16" name="Oval 15"/>
+          <p:cNvPr id="17" name="Oval 16"/>
           <p:cNvSpPr/>
           <p:nvPr/>
         </p:nvSpPr>
@@ -18261,7 +18305,51 @@
         </p:nvSpPr>
         <p:spPr>
           <a:xfrm>
-            <a:off x="868680" y="5257800"/>
+            <a:off x="868680" y="5029200"/>
+            <a:ext cx="10454335" cy="411480"/>
+          </a:xfrm>
+          <a:prstGeom prst="rect">
+            <a:avLst/>
+          </a:prstGeom>
+          <a:noFill/>
+        </p:spPr>
+        <p:txBody>
+          <a:bodyPr wrap="square" lIns="0" rIns="0" tIns="0" bIns="0" anchor="t">
+            <a:spAutoFit/>
+          </a:bodyPr>
+          <a:lstStyle/>
+          <a:p>
+            <a:pPr algn="ctr">
+              <a:lnSpc>
+                <a:spcPct val="130000"/>
+              </a:lnSpc>
+              <a:spcAft>
+                <a:spcPts val="0"/>
+              </a:spcAft>
+            </a:pPr>
+            <a:r>
+              <a:rPr sz="1800" b="0">
+                <a:solidFill>
+                  <a:srgbClr val="F4CD96"/>
+                </a:solidFill>
+                <a:latin typeface="Avenir Next"/>
+                <a:ea typeface="Avenir Next"/>
+                <a:cs typeface="Avenir Next"/>
+              </a:rPr>
+              <a:t>contextof.me</a:t>
+            </a:r>
+          </a:p>
+        </p:txBody>
+      </p:sp>
+      <p:sp>
+        <p:nvSpPr>
+          <p:cNvPr id="9" name="TextBox 8"/>
+          <p:cNvSpPr txBox="1"/>
+          <p:nvPr/>
+        </p:nvSpPr>
+        <p:spPr>
+          <a:xfrm>
+            <a:off x="868680" y="5486400"/>
             <a:ext cx="10454335" cy="365760"/>
           </a:xfrm>
           <a:prstGeom prst="rect">
@@ -20278,7 +20366,7 @@
                 <a:ea typeface="PingFang SC"/>
                 <a:cs typeface="PingFang SC"/>
               </a:rPr>
-              <a:t>知君是一只私人记忆盒子，由两部分组成，都是核心。</a:t>
+              <a:t>知君（contextofme，「关于我的上下文」）是一只私人记忆盒子，由两部分组成，都是核心。</a:t>
             </a:r>
           </a:p>
         </p:txBody>
